--- a/pentago_defense (1).pptx
+++ b/pentago_defense (1).pptx
@@ -1237,7 +1237,7 @@
           <a:p>
             <a:fld id="{5BCAD085-E8A6-8845-BD4E-CB4CCA059FC4}" type="datetimeFigureOut">
               <a:rPr lang="en-US" smtClean="0"/>
-              <a:t>8/11/2026</a:t>
+              <a:t>8/19/2026</a:t>
             </a:fld>
             <a:endParaRPr lang="en-US"/>
           </a:p>
@@ -5341,122 +5341,207 @@
       </p:grpSpPr>
       <p:sp>
         <p:nvSpPr>
-          <p:cNvPr id="2" name="Text 0"/>
-          <p:cNvSpPr/>
-          <p:nvPr/>
-        </p:nvSpPr>
-        <p:spPr>
-          <a:xfrm>
-            <a:off x="5895975" y="1819275"/>
-            <a:ext cx="1504950" cy="1504950"/>
-          </a:xfrm>
-          <a:prstGeom prst="roundRect">
-            <a:avLst>
-              <a:gd name="adj" fmla="val 121519"/>
-            </a:avLst>
-          </a:prstGeom>
-          <a:solidFill>
-            <a:srgbClr val="FFFFFF">
-              <a:alpha val="4000"/>
-            </a:srgbClr>
-          </a:solidFill>
-          <a:ln w="9525">
-            <a:solidFill>
-              <a:srgbClr val="FFFFFF"/>
-            </a:solidFill>
-          </a:ln>
-          <a:effectLst>
-            <a:outerShdw blurRad="381000" dist="152400" dir="5400000" algn="bl" rotWithShape="0">
-              <a:srgbClr val="000000">
-                <a:alpha val="25000"/>
-              </a:srgbClr>
-            </a:outerShdw>
-          </a:effectLst>
-        </p:spPr>
-        <p:txBody>
-          <a:bodyPr wrap="none" lIns="0" tIns="0" rIns="0" bIns="0" rtlCol="0" anchor="ctr">
-            <a:normAutofit/>
-          </a:bodyPr>
-          <a:lstStyle/>
-          <a:p>
-            <a:pPr marL="0" indent="0">
-              <a:buNone/>
-            </a:pPr>
-            <a:endParaRPr lang="en-US" dirty="0"/>
-          </a:p>
-        </p:txBody>
-      </p:sp>
-      <p:sp>
-        <p:nvSpPr>
-          <p:cNvPr id="3" name="Text 1"/>
-          <p:cNvSpPr/>
-          <p:nvPr/>
-        </p:nvSpPr>
-        <p:spPr>
-          <a:xfrm>
-            <a:off x="6038850" y="2609850"/>
-            <a:ext cx="1447800" cy="19050"/>
-          </a:xfrm>
-          <a:prstGeom prst="rect">
-            <a:avLst/>
-          </a:prstGeom>
-          <a:solidFill>
-            <a:srgbClr val="F5F5FF">
-              <a:alpha val="18000"/>
-            </a:srgbClr>
-          </a:solidFill>
+          <p:cNvPr id="41" name="Text 26"/>
+          <p:cNvSpPr/>
+          <p:nvPr/>
+        </p:nvSpPr>
+        <p:spPr>
+          <a:xfrm>
+            <a:off x="609600" y="-102840"/>
+            <a:ext cx="3847338" cy="190500"/>
+          </a:xfrm>
+          <a:prstGeom prst="rect">
+            <a:avLst/>
+          </a:prstGeom>
+          <a:noFill/>
           <a:ln/>
         </p:spPr>
         <p:txBody>
-          <a:bodyPr wrap="none" lIns="0" tIns="0" rIns="0" bIns="0" rtlCol="0" anchor="ctr">
-            <a:normAutofit fontScale="25000" lnSpcReduction="20000"/>
-          </a:bodyPr>
-          <a:lstStyle/>
-          <a:p>
-            <a:pPr marL="0" indent="0">
-              <a:buNone/>
-            </a:pPr>
-            <a:endParaRPr lang="en-US" dirty="0"/>
-          </a:p>
-        </p:txBody>
-      </p:sp>
-      <p:sp>
-        <p:nvSpPr>
-          <p:cNvPr id="4" name="Text 2"/>
-          <p:cNvSpPr/>
-          <p:nvPr/>
-        </p:nvSpPr>
-        <p:spPr>
-          <a:xfrm>
-            <a:off x="6686550" y="1962150"/>
-            <a:ext cx="19050" cy="1447800"/>
-          </a:xfrm>
-          <a:prstGeom prst="rect">
-            <a:avLst/>
-          </a:prstGeom>
-          <a:solidFill>
-            <a:srgbClr val="F5F5FF">
-              <a:alpha val="18000"/>
-            </a:srgbClr>
-          </a:solidFill>
+          <a:bodyPr wrap="square" lIns="0" tIns="0" rIns="0" bIns="0" rtlCol="0" anchor="t"/>
+          <a:lstStyle/>
+          <a:p>
+            <a:pPr marL="0" indent="0">
+              <a:lnSpc>
+                <a:spcPts val="1500"/>
+              </a:lnSpc>
+              <a:buNone/>
+            </a:pPr>
+            <a:endParaRPr lang="en-US" sz="1050" dirty="0"/>
+          </a:p>
+        </p:txBody>
+      </p:sp>
+      <p:sp>
+        <p:nvSpPr>
+          <p:cNvPr id="42" name="Text 27"/>
+          <p:cNvSpPr/>
+          <p:nvPr/>
+        </p:nvSpPr>
+        <p:spPr>
+          <a:xfrm>
+            <a:off x="0" y="-102840"/>
+            <a:ext cx="5600700" cy="1462980"/>
+          </a:xfrm>
+          <a:prstGeom prst="rect">
+            <a:avLst/>
+          </a:prstGeom>
+          <a:noFill/>
           <a:ln/>
         </p:spPr>
         <p:txBody>
-          <a:bodyPr wrap="none" lIns="0" tIns="0" rIns="0" bIns="0" rtlCol="0" anchor="ctr">
-            <a:normAutofit/>
-          </a:bodyPr>
-          <a:lstStyle/>
-          <a:p>
-            <a:pPr marL="0" indent="0">
-              <a:buNone/>
-            </a:pPr>
-            <a:endParaRPr lang="en-US" dirty="0"/>
+          <a:bodyPr wrap="square" lIns="0" tIns="0" rIns="0" bIns="0" rtlCol="0" anchor="t"/>
+          <a:lstStyle/>
+          <a:p>
+            <a:pPr marL="0" indent="0">
+              <a:lnSpc>
+                <a:spcPts val="5760"/>
+              </a:lnSpc>
+              <a:buNone/>
+            </a:pPr>
+            <a:r>
+              <a:rPr lang="en-US" sz="2800" b="1" dirty="0">
+                <a:solidFill>
+                  <a:srgbClr val="F8FAFC"/>
+                </a:solidFill>
+                <a:latin typeface="Times New Roman" panose="02020603050405020304" pitchFamily="18" charset="0"/>
+                <a:ea typeface="Instrument Serif" pitchFamily="34" charset="-122"/>
+                <a:cs typeface="Times New Roman" panose="02020603050405020304" pitchFamily="18" charset="0"/>
+              </a:rPr>
+              <a:t>Pentago as a state-space problem</a:t>
+            </a:r>
+            <a:endParaRPr lang="en-US" sz="2800" dirty="0">
+              <a:latin typeface="Times New Roman" panose="02020603050405020304" pitchFamily="18" charset="0"/>
+              <a:cs typeface="Times New Roman" panose="02020603050405020304" pitchFamily="18" charset="0"/>
+            </a:endParaRPr>
+          </a:p>
+        </p:txBody>
+      </p:sp>
+      <p:sp>
+        <p:nvSpPr>
+          <p:cNvPr id="43" name="Text 28"/>
+          <p:cNvSpPr/>
+          <p:nvPr/>
+        </p:nvSpPr>
+        <p:spPr>
+          <a:xfrm>
+            <a:off x="669806" y="1314450"/>
+            <a:ext cx="4113733" cy="3742046"/>
+          </a:xfrm>
+          <a:prstGeom prst="rect">
+            <a:avLst/>
+          </a:prstGeom>
+          <a:noFill/>
+          <a:ln/>
+        </p:spPr>
+        <p:txBody>
+          <a:bodyPr wrap="square" lIns="0" tIns="0" rIns="0" bIns="0" rtlCol="0" anchor="t"/>
+          <a:lstStyle/>
+          <a:p>
+            <a:pPr marL="342900" indent="-342900">
+              <a:lnSpc>
+                <a:spcPts val="2100"/>
+              </a:lnSpc>
+              <a:buSzPct val="100000"/>
+              <a:buChar char="•"/>
+            </a:pPr>
+            <a:r>
+              <a:rPr lang="en-US" sz="1600" dirty="0">
+                <a:solidFill>
+                  <a:srgbClr val="DBE4F0"/>
+                </a:solidFill>
+                <a:latin typeface="Times New Roman" panose="02020603050405020304" pitchFamily="18" charset="0"/>
+                <a:ea typeface="Inter" pitchFamily="34" charset="-122"/>
+                <a:cs typeface="Times New Roman" panose="02020603050405020304" pitchFamily="18" charset="0"/>
+              </a:rPr>
+              <a:t>The game uses a 6×6 board split into four rotatable 3×3 quadrants.</a:t>
+            </a:r>
+            <a:endParaRPr lang="en-US" sz="1600" dirty="0">
+              <a:latin typeface="Times New Roman" panose="02020603050405020304" pitchFamily="18" charset="0"/>
+              <a:cs typeface="Times New Roman" panose="02020603050405020304" pitchFamily="18" charset="0"/>
+            </a:endParaRPr>
+          </a:p>
+          <a:p>
+            <a:pPr marL="342900" indent="-342900">
+              <a:lnSpc>
+                <a:spcPts val="2100"/>
+              </a:lnSpc>
+              <a:buSzPct val="100000"/>
+              <a:buChar char="•"/>
+            </a:pPr>
+            <a:r>
+              <a:rPr lang="en-US" sz="1600" dirty="0">
+                <a:solidFill>
+                  <a:srgbClr val="DBE4F0"/>
+                </a:solidFill>
+                <a:latin typeface="Times New Roman" panose="02020603050405020304" pitchFamily="18" charset="0"/>
+                <a:ea typeface="Inter" pitchFamily="34" charset="-122"/>
+                <a:cs typeface="Times New Roman" panose="02020603050405020304" pitchFamily="18" charset="0"/>
+              </a:rPr>
+              <a:t>Each turn has two actions: place one marble, then rotate one quadrant clockwise or counter-clockwise.</a:t>
+            </a:r>
+            <a:endParaRPr lang="en-US" sz="1600" dirty="0">
+              <a:latin typeface="Times New Roman" panose="02020603050405020304" pitchFamily="18" charset="0"/>
+              <a:cs typeface="Times New Roman" panose="02020603050405020304" pitchFamily="18" charset="0"/>
+            </a:endParaRPr>
+          </a:p>
+          <a:p>
+            <a:pPr marL="342900" indent="-342900">
+              <a:lnSpc>
+                <a:spcPts val="2100"/>
+              </a:lnSpc>
+              <a:buSzPct val="100000"/>
+              <a:buChar char="•"/>
+            </a:pPr>
+            <a:r>
+              <a:rPr lang="en-US" sz="1600" dirty="0">
+                <a:solidFill>
+                  <a:srgbClr val="DBE4F0"/>
+                </a:solidFill>
+                <a:latin typeface="Times New Roman" panose="02020603050405020304" pitchFamily="18" charset="0"/>
+                <a:ea typeface="Inter" pitchFamily="34" charset="-122"/>
+                <a:cs typeface="Times New Roman" panose="02020603050405020304" pitchFamily="18" charset="0"/>
+              </a:rPr>
+              <a:t>The configured win test checks five contiguous marbles in rows or columns, not diagonals.</a:t>
+            </a:r>
+            <a:endParaRPr lang="en-US" sz="1600" dirty="0">
+              <a:latin typeface="Times New Roman" panose="02020603050405020304" pitchFamily="18" charset="0"/>
+              <a:cs typeface="Times New Roman" panose="02020603050405020304" pitchFamily="18" charset="0"/>
+            </a:endParaRPr>
+          </a:p>
+          <a:p>
+            <a:pPr marL="342900" indent="-342900">
+              <a:lnSpc>
+                <a:spcPts val="2100"/>
+              </a:lnSpc>
+              <a:buSzPct val="100000"/>
+              <a:buChar char="•"/>
+            </a:pPr>
+            <a:r>
+              <a:rPr lang="en-US" sz="1600" dirty="0">
+                <a:solidFill>
+                  <a:srgbClr val="DBE4F0"/>
+                </a:solidFill>
+                <a:latin typeface="Times New Roman" panose="02020603050405020304" pitchFamily="18" charset="0"/>
+                <a:ea typeface="Inter" pitchFamily="34" charset="-122"/>
+                <a:cs typeface="Times New Roman" panose="02020603050405020304" pitchFamily="18" charset="0"/>
+              </a:rPr>
+              <a:t>This creates a large branching factor because one placement can be paired with 8 rotation choices.</a:t>
+            </a:r>
+            <a:endParaRPr lang="en-US" sz="1600" dirty="0">
+              <a:latin typeface="Times New Roman" panose="02020603050405020304" pitchFamily="18" charset="0"/>
+              <a:cs typeface="Times New Roman" panose="02020603050405020304" pitchFamily="18" charset="0"/>
+            </a:endParaRPr>
           </a:p>
         </p:txBody>
       </p:sp>
       <p:pic>
         <p:nvPicPr>
-          <p:cNvPr id="5" name="Image 0" descr="preencoded.png"/>
+          <p:cNvPr id="45" name="Picture 44">
+            <a:extLst>
+              <a:ext uri="{FF2B5EF4-FFF2-40B4-BE49-F238E27FC236}">
+                <a16:creationId xmlns:a16="http://schemas.microsoft.com/office/drawing/2014/main" id="{E71E01AD-5F42-4760-909C-07E1B34AE4B5}"/>
+              </a:ext>
+            </a:extLst>
+          </p:cNvPr>
           <p:cNvPicPr>
             <a:picLocks noChangeAspect="1"/>
           </p:cNvPicPr>
@@ -5470,1324 +5555,14 @@
         </p:blipFill>
         <p:spPr>
           <a:xfrm>
-            <a:off x="6038850" y="1962150"/>
-            <a:ext cx="171450" cy="171450"/>
+            <a:off x="4935744" y="1360140"/>
+            <a:ext cx="3916564" cy="2104209"/>
           </a:xfrm>
           <a:prstGeom prst="rect">
             <a:avLst/>
           </a:prstGeom>
         </p:spPr>
       </p:pic>
-      <p:sp>
-        <p:nvSpPr>
-          <p:cNvPr id="6" name="Text 3"/>
-          <p:cNvSpPr/>
-          <p:nvPr/>
-        </p:nvSpPr>
-        <p:spPr>
-          <a:xfrm>
-            <a:off x="6248400" y="1962150"/>
-            <a:ext cx="171450" cy="171450"/>
-          </a:xfrm>
-          <a:prstGeom prst="roundRect">
-            <a:avLst>
-              <a:gd name="adj" fmla="val 2666667"/>
-            </a:avLst>
-          </a:prstGeom>
-          <a:solidFill>
-            <a:srgbClr val="FFFFFF">
-              <a:alpha val="8000"/>
-            </a:srgbClr>
-          </a:solidFill>
-          <a:ln/>
-        </p:spPr>
-        <p:txBody>
-          <a:bodyPr wrap="none" lIns="0" tIns="0" rIns="0" bIns="0" rtlCol="0" anchor="ctr">
-            <a:normAutofit fontScale="47500" lnSpcReduction="20000"/>
-          </a:bodyPr>
-          <a:lstStyle/>
-          <a:p>
-            <a:pPr marL="0" indent="0">
-              <a:buNone/>
-            </a:pPr>
-            <a:endParaRPr lang="en-US" dirty="0"/>
-          </a:p>
-        </p:txBody>
-      </p:sp>
-      <p:pic>
-        <p:nvPicPr>
-          <p:cNvPr id="7" name="Image 1" descr="preencoded.png"/>
-          <p:cNvPicPr>
-            <a:picLocks noChangeAspect="1"/>
-          </p:cNvPicPr>
-          <p:nvPr/>
-        </p:nvPicPr>
-        <p:blipFill>
-          <a:blip r:embed="rId4"/>
-          <a:stretch>
-            <a:fillRect/>
-          </a:stretch>
-        </p:blipFill>
-        <p:spPr>
-          <a:xfrm>
-            <a:off x="6457950" y="1962150"/>
-            <a:ext cx="171450" cy="171450"/>
-          </a:xfrm>
-          <a:prstGeom prst="rect">
-            <a:avLst/>
-          </a:prstGeom>
-        </p:spPr>
-      </p:pic>
-      <p:sp>
-        <p:nvSpPr>
-          <p:cNvPr id="8" name="Text 4"/>
-          <p:cNvSpPr/>
-          <p:nvPr/>
-        </p:nvSpPr>
-        <p:spPr>
-          <a:xfrm>
-            <a:off x="6667500" y="1962150"/>
-            <a:ext cx="171450" cy="171450"/>
-          </a:xfrm>
-          <a:prstGeom prst="roundRect">
-            <a:avLst>
-              <a:gd name="adj" fmla="val 2666667"/>
-            </a:avLst>
-          </a:prstGeom>
-          <a:solidFill>
-            <a:srgbClr val="FFFFFF">
-              <a:alpha val="8000"/>
-            </a:srgbClr>
-          </a:solidFill>
-          <a:ln/>
-        </p:spPr>
-        <p:txBody>
-          <a:bodyPr wrap="none" lIns="0" tIns="0" rIns="0" bIns="0" rtlCol="0" anchor="ctr">
-            <a:normAutofit fontScale="47500" lnSpcReduction="20000"/>
-          </a:bodyPr>
-          <a:lstStyle/>
-          <a:p>
-            <a:pPr marL="0" indent="0">
-              <a:buNone/>
-            </a:pPr>
-            <a:endParaRPr lang="en-US" dirty="0"/>
-          </a:p>
-        </p:txBody>
-      </p:sp>
-      <p:sp>
-        <p:nvSpPr>
-          <p:cNvPr id="9" name="Text 5"/>
-          <p:cNvSpPr/>
-          <p:nvPr/>
-        </p:nvSpPr>
-        <p:spPr>
-          <a:xfrm>
-            <a:off x="6877050" y="1962150"/>
-            <a:ext cx="171450" cy="171450"/>
-          </a:xfrm>
-          <a:prstGeom prst="roundRect">
-            <a:avLst>
-              <a:gd name="adj" fmla="val 2666667"/>
-            </a:avLst>
-          </a:prstGeom>
-          <a:solidFill>
-            <a:srgbClr val="FFFFFF">
-              <a:alpha val="8000"/>
-            </a:srgbClr>
-          </a:solidFill>
-          <a:ln/>
-        </p:spPr>
-        <p:txBody>
-          <a:bodyPr wrap="none" lIns="0" tIns="0" rIns="0" bIns="0" rtlCol="0" anchor="ctr">
-            <a:normAutofit fontScale="47500" lnSpcReduction="20000"/>
-          </a:bodyPr>
-          <a:lstStyle/>
-          <a:p>
-            <a:pPr marL="0" indent="0">
-              <a:buNone/>
-            </a:pPr>
-            <a:endParaRPr lang="en-US" dirty="0"/>
-          </a:p>
-        </p:txBody>
-      </p:sp>
-      <p:pic>
-        <p:nvPicPr>
-          <p:cNvPr id="10" name="Image 2" descr="preencoded.png"/>
-          <p:cNvPicPr>
-            <a:picLocks noChangeAspect="1"/>
-          </p:cNvPicPr>
-          <p:nvPr/>
-        </p:nvPicPr>
-        <p:blipFill>
-          <a:blip r:embed="rId3"/>
-          <a:stretch>
-            <a:fillRect/>
-          </a:stretch>
-        </p:blipFill>
-        <p:spPr>
-          <a:xfrm>
-            <a:off x="7086600" y="1962150"/>
-            <a:ext cx="171450" cy="171450"/>
-          </a:xfrm>
-          <a:prstGeom prst="rect">
-            <a:avLst/>
-          </a:prstGeom>
-        </p:spPr>
-      </p:pic>
-      <p:sp>
-        <p:nvSpPr>
-          <p:cNvPr id="11" name="Text 6"/>
-          <p:cNvSpPr/>
-          <p:nvPr/>
-        </p:nvSpPr>
-        <p:spPr>
-          <a:xfrm>
-            <a:off x="6038850" y="2171700"/>
-            <a:ext cx="171450" cy="171450"/>
-          </a:xfrm>
-          <a:prstGeom prst="roundRect">
-            <a:avLst>
-              <a:gd name="adj" fmla="val 2666667"/>
-            </a:avLst>
-          </a:prstGeom>
-          <a:solidFill>
-            <a:srgbClr val="FFFFFF">
-              <a:alpha val="8000"/>
-            </a:srgbClr>
-          </a:solidFill>
-          <a:ln/>
-        </p:spPr>
-        <p:txBody>
-          <a:bodyPr wrap="none" lIns="0" tIns="0" rIns="0" bIns="0" rtlCol="0" anchor="ctr">
-            <a:normAutofit fontScale="47500" lnSpcReduction="20000"/>
-          </a:bodyPr>
-          <a:lstStyle/>
-          <a:p>
-            <a:pPr marL="0" indent="0">
-              <a:buNone/>
-            </a:pPr>
-            <a:endParaRPr lang="en-US" dirty="0"/>
-          </a:p>
-        </p:txBody>
-      </p:sp>
-      <p:pic>
-        <p:nvPicPr>
-          <p:cNvPr id="12" name="Image 3" descr="preencoded.png"/>
-          <p:cNvPicPr>
-            <a:picLocks noChangeAspect="1"/>
-          </p:cNvPicPr>
-          <p:nvPr/>
-        </p:nvPicPr>
-        <p:blipFill>
-          <a:blip r:embed="rId3"/>
-          <a:stretch>
-            <a:fillRect/>
-          </a:stretch>
-        </p:blipFill>
-        <p:spPr>
-          <a:xfrm>
-            <a:off x="6248400" y="2171700"/>
-            <a:ext cx="171450" cy="171450"/>
-          </a:xfrm>
-          <a:prstGeom prst="rect">
-            <a:avLst/>
-          </a:prstGeom>
-        </p:spPr>
-      </p:pic>
-      <p:sp>
-        <p:nvSpPr>
-          <p:cNvPr id="13" name="Text 7"/>
-          <p:cNvSpPr/>
-          <p:nvPr/>
-        </p:nvSpPr>
-        <p:spPr>
-          <a:xfrm>
-            <a:off x="6457950" y="2171700"/>
-            <a:ext cx="171450" cy="171450"/>
-          </a:xfrm>
-          <a:prstGeom prst="roundRect">
-            <a:avLst>
-              <a:gd name="adj" fmla="val 2666667"/>
-            </a:avLst>
-          </a:prstGeom>
-          <a:solidFill>
-            <a:srgbClr val="FFFFFF">
-              <a:alpha val="8000"/>
-            </a:srgbClr>
-          </a:solidFill>
-          <a:ln/>
-        </p:spPr>
-        <p:txBody>
-          <a:bodyPr wrap="none" lIns="0" tIns="0" rIns="0" bIns="0" rtlCol="0" anchor="ctr">
-            <a:normAutofit fontScale="47500" lnSpcReduction="20000"/>
-          </a:bodyPr>
-          <a:lstStyle/>
-          <a:p>
-            <a:pPr marL="0" indent="0">
-              <a:buNone/>
-            </a:pPr>
-            <a:endParaRPr lang="en-US" dirty="0"/>
-          </a:p>
-        </p:txBody>
-      </p:sp>
-      <p:pic>
-        <p:nvPicPr>
-          <p:cNvPr id="14" name="Image 4" descr="preencoded.png"/>
-          <p:cNvPicPr>
-            <a:picLocks noChangeAspect="1"/>
-          </p:cNvPicPr>
-          <p:nvPr/>
-        </p:nvPicPr>
-        <p:blipFill>
-          <a:blip r:embed="rId4"/>
-          <a:stretch>
-            <a:fillRect/>
-          </a:stretch>
-        </p:blipFill>
-        <p:spPr>
-          <a:xfrm>
-            <a:off x="6667500" y="2171700"/>
-            <a:ext cx="171450" cy="171450"/>
-          </a:xfrm>
-          <a:prstGeom prst="rect">
-            <a:avLst/>
-          </a:prstGeom>
-        </p:spPr>
-      </p:pic>
-      <p:sp>
-        <p:nvSpPr>
-          <p:cNvPr id="15" name="Text 8"/>
-          <p:cNvSpPr/>
-          <p:nvPr/>
-        </p:nvSpPr>
-        <p:spPr>
-          <a:xfrm>
-            <a:off x="6877050" y="2171700"/>
-            <a:ext cx="171450" cy="171450"/>
-          </a:xfrm>
-          <a:prstGeom prst="roundRect">
-            <a:avLst>
-              <a:gd name="adj" fmla="val 2666667"/>
-            </a:avLst>
-          </a:prstGeom>
-          <a:solidFill>
-            <a:srgbClr val="FFFFFF">
-              <a:alpha val="8000"/>
-            </a:srgbClr>
-          </a:solidFill>
-          <a:ln/>
-        </p:spPr>
-        <p:txBody>
-          <a:bodyPr wrap="none" lIns="0" tIns="0" rIns="0" bIns="0" rtlCol="0" anchor="ctr">
-            <a:normAutofit fontScale="47500" lnSpcReduction="20000"/>
-          </a:bodyPr>
-          <a:lstStyle/>
-          <a:p>
-            <a:pPr marL="0" indent="0">
-              <a:buNone/>
-            </a:pPr>
-            <a:endParaRPr lang="en-US" dirty="0"/>
-          </a:p>
-        </p:txBody>
-      </p:sp>
-      <p:sp>
-        <p:nvSpPr>
-          <p:cNvPr id="16" name="Text 9"/>
-          <p:cNvSpPr/>
-          <p:nvPr/>
-        </p:nvSpPr>
-        <p:spPr>
-          <a:xfrm>
-            <a:off x="7086600" y="2171700"/>
-            <a:ext cx="171450" cy="171450"/>
-          </a:xfrm>
-          <a:prstGeom prst="roundRect">
-            <a:avLst>
-              <a:gd name="adj" fmla="val 2666667"/>
-            </a:avLst>
-          </a:prstGeom>
-          <a:solidFill>
-            <a:srgbClr val="FFFFFF">
-              <a:alpha val="8000"/>
-            </a:srgbClr>
-          </a:solidFill>
-          <a:ln/>
-        </p:spPr>
-        <p:txBody>
-          <a:bodyPr wrap="none" lIns="0" tIns="0" rIns="0" bIns="0" rtlCol="0" anchor="ctr">
-            <a:normAutofit fontScale="47500" lnSpcReduction="20000"/>
-          </a:bodyPr>
-          <a:lstStyle/>
-          <a:p>
-            <a:pPr marL="0" indent="0">
-              <a:buNone/>
-            </a:pPr>
-            <a:endParaRPr lang="en-US" dirty="0"/>
-          </a:p>
-        </p:txBody>
-      </p:sp>
-      <p:sp>
-        <p:nvSpPr>
-          <p:cNvPr id="17" name="Text 10"/>
-          <p:cNvSpPr/>
-          <p:nvPr/>
-        </p:nvSpPr>
-        <p:spPr>
-          <a:xfrm>
-            <a:off x="6038850" y="2381250"/>
-            <a:ext cx="171450" cy="171450"/>
-          </a:xfrm>
-          <a:prstGeom prst="roundRect">
-            <a:avLst>
-              <a:gd name="adj" fmla="val 2666667"/>
-            </a:avLst>
-          </a:prstGeom>
-          <a:solidFill>
-            <a:srgbClr val="FFFFFF">
-              <a:alpha val="8000"/>
-            </a:srgbClr>
-          </a:solidFill>
-          <a:ln/>
-        </p:spPr>
-        <p:txBody>
-          <a:bodyPr wrap="none" lIns="0" tIns="0" rIns="0" bIns="0" rtlCol="0" anchor="ctr">
-            <a:normAutofit fontScale="47500" lnSpcReduction="20000"/>
-          </a:bodyPr>
-          <a:lstStyle/>
-          <a:p>
-            <a:pPr marL="0" indent="0">
-              <a:buNone/>
-            </a:pPr>
-            <a:endParaRPr lang="en-US" dirty="0"/>
-          </a:p>
-        </p:txBody>
-      </p:sp>
-      <p:sp>
-        <p:nvSpPr>
-          <p:cNvPr id="18" name="Text 11"/>
-          <p:cNvSpPr/>
-          <p:nvPr/>
-        </p:nvSpPr>
-        <p:spPr>
-          <a:xfrm>
-            <a:off x="6248400" y="2381250"/>
-            <a:ext cx="171450" cy="171450"/>
-          </a:xfrm>
-          <a:prstGeom prst="roundRect">
-            <a:avLst>
-              <a:gd name="adj" fmla="val 2666667"/>
-            </a:avLst>
-          </a:prstGeom>
-          <a:solidFill>
-            <a:srgbClr val="FFFFFF">
-              <a:alpha val="8000"/>
-            </a:srgbClr>
-          </a:solidFill>
-          <a:ln/>
-        </p:spPr>
-        <p:txBody>
-          <a:bodyPr wrap="none" lIns="0" tIns="0" rIns="0" bIns="0" rtlCol="0" anchor="ctr">
-            <a:normAutofit fontScale="47500" lnSpcReduction="20000"/>
-          </a:bodyPr>
-          <a:lstStyle/>
-          <a:p>
-            <a:pPr marL="0" indent="0">
-              <a:buNone/>
-            </a:pPr>
-            <a:endParaRPr lang="en-US" dirty="0"/>
-          </a:p>
-        </p:txBody>
-      </p:sp>
-      <p:pic>
-        <p:nvPicPr>
-          <p:cNvPr id="19" name="Image 5" descr="preencoded.png"/>
-          <p:cNvPicPr>
-            <a:picLocks noChangeAspect="1"/>
-          </p:cNvPicPr>
-          <p:nvPr/>
-        </p:nvPicPr>
-        <p:blipFill>
-          <a:blip r:embed="rId4"/>
-          <a:stretch>
-            <a:fillRect/>
-          </a:stretch>
-        </p:blipFill>
-        <p:spPr>
-          <a:xfrm>
-            <a:off x="6457950" y="2381250"/>
-            <a:ext cx="171450" cy="171450"/>
-          </a:xfrm>
-          <a:prstGeom prst="rect">
-            <a:avLst/>
-          </a:prstGeom>
-        </p:spPr>
-      </p:pic>
-      <p:sp>
-        <p:nvSpPr>
-          <p:cNvPr id="20" name="Text 12"/>
-          <p:cNvSpPr/>
-          <p:nvPr/>
-        </p:nvSpPr>
-        <p:spPr>
-          <a:xfrm>
-            <a:off x="6667500" y="2381250"/>
-            <a:ext cx="171450" cy="171450"/>
-          </a:xfrm>
-          <a:prstGeom prst="roundRect">
-            <a:avLst>
-              <a:gd name="adj" fmla="val 2666667"/>
-            </a:avLst>
-          </a:prstGeom>
-          <a:solidFill>
-            <a:srgbClr val="FFFFFF">
-              <a:alpha val="8000"/>
-            </a:srgbClr>
-          </a:solidFill>
-          <a:ln/>
-        </p:spPr>
-        <p:txBody>
-          <a:bodyPr wrap="none" lIns="0" tIns="0" rIns="0" bIns="0" rtlCol="0" anchor="ctr">
-            <a:normAutofit fontScale="47500" lnSpcReduction="20000"/>
-          </a:bodyPr>
-          <a:lstStyle/>
-          <a:p>
-            <a:pPr marL="0" indent="0">
-              <a:buNone/>
-            </a:pPr>
-            <a:endParaRPr lang="en-US" dirty="0"/>
-          </a:p>
-        </p:txBody>
-      </p:sp>
-      <p:pic>
-        <p:nvPicPr>
-          <p:cNvPr id="21" name="Image 6" descr="preencoded.png"/>
-          <p:cNvPicPr>
-            <a:picLocks noChangeAspect="1"/>
-          </p:cNvPicPr>
-          <p:nvPr/>
-        </p:nvPicPr>
-        <p:blipFill>
-          <a:blip r:embed="rId3"/>
-          <a:stretch>
-            <a:fillRect/>
-          </a:stretch>
-        </p:blipFill>
-        <p:spPr>
-          <a:xfrm>
-            <a:off x="6877050" y="2381250"/>
-            <a:ext cx="171450" cy="171450"/>
-          </a:xfrm>
-          <a:prstGeom prst="rect">
-            <a:avLst/>
-          </a:prstGeom>
-        </p:spPr>
-      </p:pic>
-      <p:sp>
-        <p:nvSpPr>
-          <p:cNvPr id="22" name="Text 13"/>
-          <p:cNvSpPr/>
-          <p:nvPr/>
-        </p:nvSpPr>
-        <p:spPr>
-          <a:xfrm>
-            <a:off x="7086600" y="2381250"/>
-            <a:ext cx="171450" cy="171450"/>
-          </a:xfrm>
-          <a:prstGeom prst="roundRect">
-            <a:avLst>
-              <a:gd name="adj" fmla="val 2666667"/>
-            </a:avLst>
-          </a:prstGeom>
-          <a:solidFill>
-            <a:srgbClr val="FFFFFF">
-              <a:alpha val="8000"/>
-            </a:srgbClr>
-          </a:solidFill>
-          <a:ln/>
-        </p:spPr>
-        <p:txBody>
-          <a:bodyPr wrap="none" lIns="0" tIns="0" rIns="0" bIns="0" rtlCol="0" anchor="ctr">
-            <a:normAutofit fontScale="47500" lnSpcReduction="20000"/>
-          </a:bodyPr>
-          <a:lstStyle/>
-          <a:p>
-            <a:pPr marL="0" indent="0">
-              <a:buNone/>
-            </a:pPr>
-            <a:endParaRPr lang="en-US" dirty="0"/>
-          </a:p>
-        </p:txBody>
-      </p:sp>
-      <p:pic>
-        <p:nvPicPr>
-          <p:cNvPr id="23" name="Image 7" descr="preencoded.png"/>
-          <p:cNvPicPr>
-            <a:picLocks noChangeAspect="1"/>
-          </p:cNvPicPr>
-          <p:nvPr/>
-        </p:nvPicPr>
-        <p:blipFill>
-          <a:blip r:embed="rId4"/>
-          <a:stretch>
-            <a:fillRect/>
-          </a:stretch>
-        </p:blipFill>
-        <p:spPr>
-          <a:xfrm>
-            <a:off x="6038850" y="2590800"/>
-            <a:ext cx="171450" cy="171450"/>
-          </a:xfrm>
-          <a:prstGeom prst="rect">
-            <a:avLst/>
-          </a:prstGeom>
-        </p:spPr>
-      </p:pic>
-      <p:sp>
-        <p:nvSpPr>
-          <p:cNvPr id="24" name="Text 14"/>
-          <p:cNvSpPr/>
-          <p:nvPr/>
-        </p:nvSpPr>
-        <p:spPr>
-          <a:xfrm>
-            <a:off x="6248400" y="2590800"/>
-            <a:ext cx="171450" cy="171450"/>
-          </a:xfrm>
-          <a:prstGeom prst="roundRect">
-            <a:avLst>
-              <a:gd name="adj" fmla="val 2666667"/>
-            </a:avLst>
-          </a:prstGeom>
-          <a:solidFill>
-            <a:srgbClr val="FFFFFF">
-              <a:alpha val="8000"/>
-            </a:srgbClr>
-          </a:solidFill>
-          <a:ln/>
-        </p:spPr>
-        <p:txBody>
-          <a:bodyPr wrap="none" lIns="0" tIns="0" rIns="0" bIns="0" rtlCol="0" anchor="ctr">
-            <a:normAutofit fontScale="47500" lnSpcReduction="20000"/>
-          </a:bodyPr>
-          <a:lstStyle/>
-          <a:p>
-            <a:pPr marL="0" indent="0">
-              <a:buNone/>
-            </a:pPr>
-            <a:endParaRPr lang="en-US" dirty="0"/>
-          </a:p>
-        </p:txBody>
-      </p:sp>
-      <p:sp>
-        <p:nvSpPr>
-          <p:cNvPr id="25" name="Text 15"/>
-          <p:cNvSpPr/>
-          <p:nvPr/>
-        </p:nvSpPr>
-        <p:spPr>
-          <a:xfrm>
-            <a:off x="6457950" y="2590800"/>
-            <a:ext cx="171450" cy="171450"/>
-          </a:xfrm>
-          <a:prstGeom prst="roundRect">
-            <a:avLst>
-              <a:gd name="adj" fmla="val 2666667"/>
-            </a:avLst>
-          </a:prstGeom>
-          <a:solidFill>
-            <a:srgbClr val="FFFFFF">
-              <a:alpha val="8000"/>
-            </a:srgbClr>
-          </a:solidFill>
-          <a:ln/>
-        </p:spPr>
-        <p:txBody>
-          <a:bodyPr wrap="none" lIns="0" tIns="0" rIns="0" bIns="0" rtlCol="0" anchor="ctr">
-            <a:normAutofit fontScale="47500" lnSpcReduction="20000"/>
-          </a:bodyPr>
-          <a:lstStyle/>
-          <a:p>
-            <a:pPr marL="0" indent="0">
-              <a:buNone/>
-            </a:pPr>
-            <a:endParaRPr lang="en-US" dirty="0"/>
-          </a:p>
-        </p:txBody>
-      </p:sp>
-      <p:pic>
-        <p:nvPicPr>
-          <p:cNvPr id="26" name="Image 8" descr="preencoded.png"/>
-          <p:cNvPicPr>
-            <a:picLocks noChangeAspect="1"/>
-          </p:cNvPicPr>
-          <p:nvPr/>
-        </p:nvPicPr>
-        <p:blipFill>
-          <a:blip r:embed="rId3"/>
-          <a:stretch>
-            <a:fillRect/>
-          </a:stretch>
-        </p:blipFill>
-        <p:spPr>
-          <a:xfrm>
-            <a:off x="6667500" y="2590800"/>
-            <a:ext cx="171450" cy="171450"/>
-          </a:xfrm>
-          <a:prstGeom prst="rect">
-            <a:avLst/>
-          </a:prstGeom>
-        </p:spPr>
-      </p:pic>
-      <p:sp>
-        <p:nvSpPr>
-          <p:cNvPr id="27" name="Text 16"/>
-          <p:cNvSpPr/>
-          <p:nvPr/>
-        </p:nvSpPr>
-        <p:spPr>
-          <a:xfrm>
-            <a:off x="6877050" y="2590800"/>
-            <a:ext cx="171450" cy="171450"/>
-          </a:xfrm>
-          <a:prstGeom prst="roundRect">
-            <a:avLst>
-              <a:gd name="adj" fmla="val 2666667"/>
-            </a:avLst>
-          </a:prstGeom>
-          <a:solidFill>
-            <a:srgbClr val="FFFFFF">
-              <a:alpha val="8000"/>
-            </a:srgbClr>
-          </a:solidFill>
-          <a:ln/>
-        </p:spPr>
-        <p:txBody>
-          <a:bodyPr wrap="none" lIns="0" tIns="0" rIns="0" bIns="0" rtlCol="0" anchor="ctr">
-            <a:normAutofit fontScale="47500" lnSpcReduction="20000"/>
-          </a:bodyPr>
-          <a:lstStyle/>
-          <a:p>
-            <a:pPr marL="0" indent="0">
-              <a:buNone/>
-            </a:pPr>
-            <a:endParaRPr lang="en-US" dirty="0"/>
-          </a:p>
-        </p:txBody>
-      </p:sp>
-      <p:sp>
-        <p:nvSpPr>
-          <p:cNvPr id="28" name="Text 17"/>
-          <p:cNvSpPr/>
-          <p:nvPr/>
-        </p:nvSpPr>
-        <p:spPr>
-          <a:xfrm>
-            <a:off x="7086600" y="2590800"/>
-            <a:ext cx="171450" cy="171450"/>
-          </a:xfrm>
-          <a:prstGeom prst="roundRect">
-            <a:avLst>
-              <a:gd name="adj" fmla="val 2666667"/>
-            </a:avLst>
-          </a:prstGeom>
-          <a:solidFill>
-            <a:srgbClr val="FFFFFF">
-              <a:alpha val="8000"/>
-            </a:srgbClr>
-          </a:solidFill>
-          <a:ln/>
-        </p:spPr>
-        <p:txBody>
-          <a:bodyPr wrap="none" lIns="0" tIns="0" rIns="0" bIns="0" rtlCol="0" anchor="ctr">
-            <a:normAutofit fontScale="47500" lnSpcReduction="20000"/>
-          </a:bodyPr>
-          <a:lstStyle/>
-          <a:p>
-            <a:pPr marL="0" indent="0">
-              <a:buNone/>
-            </a:pPr>
-            <a:endParaRPr lang="en-US" dirty="0"/>
-          </a:p>
-        </p:txBody>
-      </p:sp>
-      <p:sp>
-        <p:nvSpPr>
-          <p:cNvPr id="29" name="Text 18"/>
-          <p:cNvSpPr/>
-          <p:nvPr/>
-        </p:nvSpPr>
-        <p:spPr>
-          <a:xfrm>
-            <a:off x="6038850" y="2800350"/>
-            <a:ext cx="171450" cy="171450"/>
-          </a:xfrm>
-          <a:prstGeom prst="roundRect">
-            <a:avLst>
-              <a:gd name="adj" fmla="val 2666667"/>
-            </a:avLst>
-          </a:prstGeom>
-          <a:solidFill>
-            <a:srgbClr val="FFFFFF">
-              <a:alpha val="8000"/>
-            </a:srgbClr>
-          </a:solidFill>
-          <a:ln/>
-        </p:spPr>
-        <p:txBody>
-          <a:bodyPr wrap="none" lIns="0" tIns="0" rIns="0" bIns="0" rtlCol="0" anchor="ctr">
-            <a:normAutofit fontScale="47500" lnSpcReduction="20000"/>
-          </a:bodyPr>
-          <a:lstStyle/>
-          <a:p>
-            <a:pPr marL="0" indent="0">
-              <a:buNone/>
-            </a:pPr>
-            <a:endParaRPr lang="en-US" dirty="0"/>
-          </a:p>
-        </p:txBody>
-      </p:sp>
-      <p:pic>
-        <p:nvPicPr>
-          <p:cNvPr id="30" name="Image 9" descr="preencoded.png"/>
-          <p:cNvPicPr>
-            <a:picLocks noChangeAspect="1"/>
-          </p:cNvPicPr>
-          <p:nvPr/>
-        </p:nvPicPr>
-        <p:blipFill>
-          <a:blip r:embed="rId4"/>
-          <a:stretch>
-            <a:fillRect/>
-          </a:stretch>
-        </p:blipFill>
-        <p:spPr>
-          <a:xfrm>
-            <a:off x="6248400" y="2800350"/>
-            <a:ext cx="171450" cy="171450"/>
-          </a:xfrm>
-          <a:prstGeom prst="rect">
-            <a:avLst/>
-          </a:prstGeom>
-        </p:spPr>
-      </p:pic>
-      <p:sp>
-        <p:nvSpPr>
-          <p:cNvPr id="31" name="Text 19"/>
-          <p:cNvSpPr/>
-          <p:nvPr/>
-        </p:nvSpPr>
-        <p:spPr>
-          <a:xfrm>
-            <a:off x="6457950" y="2800350"/>
-            <a:ext cx="171450" cy="171450"/>
-          </a:xfrm>
-          <a:prstGeom prst="roundRect">
-            <a:avLst>
-              <a:gd name="adj" fmla="val 2666667"/>
-            </a:avLst>
-          </a:prstGeom>
-          <a:solidFill>
-            <a:srgbClr val="FFFFFF">
-              <a:alpha val="8000"/>
-            </a:srgbClr>
-          </a:solidFill>
-          <a:ln/>
-        </p:spPr>
-        <p:txBody>
-          <a:bodyPr wrap="none" lIns="0" tIns="0" rIns="0" bIns="0" rtlCol="0" anchor="ctr">
-            <a:normAutofit fontScale="47500" lnSpcReduction="20000"/>
-          </a:bodyPr>
-          <a:lstStyle/>
-          <a:p>
-            <a:pPr marL="0" indent="0">
-              <a:buNone/>
-            </a:pPr>
-            <a:endParaRPr lang="en-US" dirty="0"/>
-          </a:p>
-        </p:txBody>
-      </p:sp>
-      <p:sp>
-        <p:nvSpPr>
-          <p:cNvPr id="32" name="Text 20"/>
-          <p:cNvSpPr/>
-          <p:nvPr/>
-        </p:nvSpPr>
-        <p:spPr>
-          <a:xfrm>
-            <a:off x="6667500" y="2800350"/>
-            <a:ext cx="171450" cy="171450"/>
-          </a:xfrm>
-          <a:prstGeom prst="roundRect">
-            <a:avLst>
-              <a:gd name="adj" fmla="val 2666667"/>
-            </a:avLst>
-          </a:prstGeom>
-          <a:solidFill>
-            <a:srgbClr val="FFFFFF">
-              <a:alpha val="8000"/>
-            </a:srgbClr>
-          </a:solidFill>
-          <a:ln/>
-        </p:spPr>
-        <p:txBody>
-          <a:bodyPr wrap="none" lIns="0" tIns="0" rIns="0" bIns="0" rtlCol="0" anchor="ctr">
-            <a:normAutofit fontScale="47500" lnSpcReduction="20000"/>
-          </a:bodyPr>
-          <a:lstStyle/>
-          <a:p>
-            <a:pPr marL="0" indent="0">
-              <a:buNone/>
-            </a:pPr>
-            <a:endParaRPr lang="en-US" dirty="0"/>
-          </a:p>
-        </p:txBody>
-      </p:sp>
-      <p:pic>
-        <p:nvPicPr>
-          <p:cNvPr id="33" name="Image 10" descr="preencoded.png"/>
-          <p:cNvPicPr>
-            <a:picLocks noChangeAspect="1"/>
-          </p:cNvPicPr>
-          <p:nvPr/>
-        </p:nvPicPr>
-        <p:blipFill>
-          <a:blip r:embed="rId3"/>
-          <a:stretch>
-            <a:fillRect/>
-          </a:stretch>
-        </p:blipFill>
-        <p:spPr>
-          <a:xfrm>
-            <a:off x="6877050" y="2800350"/>
-            <a:ext cx="171450" cy="171450"/>
-          </a:xfrm>
-          <a:prstGeom prst="rect">
-            <a:avLst/>
-          </a:prstGeom>
-        </p:spPr>
-      </p:pic>
-      <p:sp>
-        <p:nvSpPr>
-          <p:cNvPr id="34" name="Text 21"/>
-          <p:cNvSpPr/>
-          <p:nvPr/>
-        </p:nvSpPr>
-        <p:spPr>
-          <a:xfrm>
-            <a:off x="7086600" y="2800350"/>
-            <a:ext cx="171450" cy="171450"/>
-          </a:xfrm>
-          <a:prstGeom prst="roundRect">
-            <a:avLst>
-              <a:gd name="adj" fmla="val 2666667"/>
-            </a:avLst>
-          </a:prstGeom>
-          <a:solidFill>
-            <a:srgbClr val="FFFFFF">
-              <a:alpha val="8000"/>
-            </a:srgbClr>
-          </a:solidFill>
-          <a:ln/>
-        </p:spPr>
-        <p:txBody>
-          <a:bodyPr wrap="none" lIns="0" tIns="0" rIns="0" bIns="0" rtlCol="0" anchor="ctr">
-            <a:normAutofit fontScale="47500" lnSpcReduction="20000"/>
-          </a:bodyPr>
-          <a:lstStyle/>
-          <a:p>
-            <a:pPr marL="0" indent="0">
-              <a:buNone/>
-            </a:pPr>
-            <a:endParaRPr lang="en-US" dirty="0"/>
-          </a:p>
-        </p:txBody>
-      </p:sp>
-      <p:sp>
-        <p:nvSpPr>
-          <p:cNvPr id="35" name="Text 22"/>
-          <p:cNvSpPr/>
-          <p:nvPr/>
-        </p:nvSpPr>
-        <p:spPr>
-          <a:xfrm>
-            <a:off x="6038850" y="3009900"/>
-            <a:ext cx="171450" cy="171450"/>
-          </a:xfrm>
-          <a:prstGeom prst="roundRect">
-            <a:avLst>
-              <a:gd name="adj" fmla="val 2666667"/>
-            </a:avLst>
-          </a:prstGeom>
-          <a:solidFill>
-            <a:srgbClr val="FFFFFF">
-              <a:alpha val="8000"/>
-            </a:srgbClr>
-          </a:solidFill>
-          <a:ln/>
-        </p:spPr>
-        <p:txBody>
-          <a:bodyPr wrap="none" lIns="0" tIns="0" rIns="0" bIns="0" rtlCol="0" anchor="ctr">
-            <a:normAutofit fontScale="47500" lnSpcReduction="20000"/>
-          </a:bodyPr>
-          <a:lstStyle/>
-          <a:p>
-            <a:pPr marL="0" indent="0">
-              <a:buNone/>
-            </a:pPr>
-            <a:endParaRPr lang="en-US" dirty="0"/>
-          </a:p>
-        </p:txBody>
-      </p:sp>
-      <p:sp>
-        <p:nvSpPr>
-          <p:cNvPr id="36" name="Text 23"/>
-          <p:cNvSpPr/>
-          <p:nvPr/>
-        </p:nvSpPr>
-        <p:spPr>
-          <a:xfrm>
-            <a:off x="6248400" y="3009900"/>
-            <a:ext cx="171450" cy="171450"/>
-          </a:xfrm>
-          <a:prstGeom prst="roundRect">
-            <a:avLst>
-              <a:gd name="adj" fmla="val 2666667"/>
-            </a:avLst>
-          </a:prstGeom>
-          <a:solidFill>
-            <a:srgbClr val="FFFFFF">
-              <a:alpha val="8000"/>
-            </a:srgbClr>
-          </a:solidFill>
-          <a:ln/>
-        </p:spPr>
-        <p:txBody>
-          <a:bodyPr wrap="none" lIns="0" tIns="0" rIns="0" bIns="0" rtlCol="0" anchor="ctr">
-            <a:normAutofit fontScale="47500" lnSpcReduction="20000"/>
-          </a:bodyPr>
-          <a:lstStyle/>
-          <a:p>
-            <a:pPr marL="0" indent="0">
-              <a:buNone/>
-            </a:pPr>
-            <a:endParaRPr lang="en-US" dirty="0"/>
-          </a:p>
-        </p:txBody>
-      </p:sp>
-      <p:pic>
-        <p:nvPicPr>
-          <p:cNvPr id="37" name="Image 11" descr="preencoded.png"/>
-          <p:cNvPicPr>
-            <a:picLocks noChangeAspect="1"/>
-          </p:cNvPicPr>
-          <p:nvPr/>
-        </p:nvPicPr>
-        <p:blipFill>
-          <a:blip r:embed="rId3"/>
-          <a:stretch>
-            <a:fillRect/>
-          </a:stretch>
-        </p:blipFill>
-        <p:spPr>
-          <a:xfrm>
-            <a:off x="6457950" y="3009900"/>
-            <a:ext cx="171450" cy="171450"/>
-          </a:xfrm>
-          <a:prstGeom prst="rect">
-            <a:avLst/>
-          </a:prstGeom>
-        </p:spPr>
-      </p:pic>
-      <p:pic>
-        <p:nvPicPr>
-          <p:cNvPr id="38" name="Image 12" descr="preencoded.png"/>
-          <p:cNvPicPr>
-            <a:picLocks noChangeAspect="1"/>
-          </p:cNvPicPr>
-          <p:nvPr/>
-        </p:nvPicPr>
-        <p:blipFill>
-          <a:blip r:embed="rId4"/>
-          <a:stretch>
-            <a:fillRect/>
-          </a:stretch>
-        </p:blipFill>
-        <p:spPr>
-          <a:xfrm>
-            <a:off x="6667500" y="3009900"/>
-            <a:ext cx="171450" cy="171450"/>
-          </a:xfrm>
-          <a:prstGeom prst="rect">
-            <a:avLst/>
-          </a:prstGeom>
-        </p:spPr>
-      </p:pic>
-      <p:sp>
-        <p:nvSpPr>
-          <p:cNvPr id="39" name="Text 24"/>
-          <p:cNvSpPr/>
-          <p:nvPr/>
-        </p:nvSpPr>
-        <p:spPr>
-          <a:xfrm>
-            <a:off x="6877050" y="3009900"/>
-            <a:ext cx="171450" cy="171450"/>
-          </a:xfrm>
-          <a:prstGeom prst="roundRect">
-            <a:avLst>
-              <a:gd name="adj" fmla="val 2666667"/>
-            </a:avLst>
-          </a:prstGeom>
-          <a:solidFill>
-            <a:srgbClr val="FFFFFF">
-              <a:alpha val="8000"/>
-            </a:srgbClr>
-          </a:solidFill>
-          <a:ln/>
-        </p:spPr>
-        <p:txBody>
-          <a:bodyPr wrap="none" lIns="0" tIns="0" rIns="0" bIns="0" rtlCol="0" anchor="ctr">
-            <a:normAutofit fontScale="47500" lnSpcReduction="20000"/>
-          </a:bodyPr>
-          <a:lstStyle/>
-          <a:p>
-            <a:pPr marL="0" indent="0">
-              <a:buNone/>
-            </a:pPr>
-            <a:endParaRPr lang="en-US" dirty="0"/>
-          </a:p>
-        </p:txBody>
-      </p:sp>
-      <p:sp>
-        <p:nvSpPr>
-          <p:cNvPr id="40" name="Text 25"/>
-          <p:cNvSpPr/>
-          <p:nvPr/>
-        </p:nvSpPr>
-        <p:spPr>
-          <a:xfrm>
-            <a:off x="7086600" y="3009900"/>
-            <a:ext cx="171450" cy="171450"/>
-          </a:xfrm>
-          <a:prstGeom prst="roundRect">
-            <a:avLst>
-              <a:gd name="adj" fmla="val 2666667"/>
-            </a:avLst>
-          </a:prstGeom>
-          <a:solidFill>
-            <a:srgbClr val="FFFFFF">
-              <a:alpha val="8000"/>
-            </a:srgbClr>
-          </a:solidFill>
-          <a:ln/>
-        </p:spPr>
-        <p:txBody>
-          <a:bodyPr wrap="none" lIns="0" tIns="0" rIns="0" bIns="0" rtlCol="0" anchor="ctr">
-            <a:normAutofit fontScale="47500" lnSpcReduction="20000"/>
-          </a:bodyPr>
-          <a:lstStyle/>
-          <a:p>
-            <a:pPr marL="0" indent="0">
-              <a:buNone/>
-            </a:pPr>
-            <a:endParaRPr lang="en-US" dirty="0"/>
-          </a:p>
-        </p:txBody>
-      </p:sp>
-      <p:sp>
-        <p:nvSpPr>
-          <p:cNvPr id="41" name="Text 26"/>
-          <p:cNvSpPr/>
-          <p:nvPr/>
-        </p:nvSpPr>
-        <p:spPr>
-          <a:xfrm>
-            <a:off x="609600" y="-102840"/>
-            <a:ext cx="3847338" cy="190500"/>
-          </a:xfrm>
-          <a:prstGeom prst="rect">
-            <a:avLst/>
-          </a:prstGeom>
-          <a:noFill/>
-          <a:ln/>
-        </p:spPr>
-        <p:txBody>
-          <a:bodyPr wrap="square" lIns="0" tIns="0" rIns="0" bIns="0" rtlCol="0" anchor="t"/>
-          <a:lstStyle/>
-          <a:p>
-            <a:pPr marL="0" indent="0">
-              <a:lnSpc>
-                <a:spcPts val="1500"/>
-              </a:lnSpc>
-              <a:buNone/>
-            </a:pPr>
-            <a:endParaRPr lang="en-US" sz="1050" dirty="0"/>
-          </a:p>
-        </p:txBody>
-      </p:sp>
-      <p:sp>
-        <p:nvSpPr>
-          <p:cNvPr id="42" name="Text 27"/>
-          <p:cNvSpPr/>
-          <p:nvPr/>
-        </p:nvSpPr>
-        <p:spPr>
-          <a:xfrm>
-            <a:off x="609600" y="201960"/>
-            <a:ext cx="5600700" cy="1462980"/>
-          </a:xfrm>
-          <a:prstGeom prst="rect">
-            <a:avLst/>
-          </a:prstGeom>
-          <a:noFill/>
-          <a:ln/>
-        </p:spPr>
-        <p:txBody>
-          <a:bodyPr wrap="square" lIns="0" tIns="0" rIns="0" bIns="0" rtlCol="0" anchor="t"/>
-          <a:lstStyle/>
-          <a:p>
-            <a:pPr marL="0" indent="0">
-              <a:lnSpc>
-                <a:spcPts val="5760"/>
-              </a:lnSpc>
-              <a:buNone/>
-            </a:pPr>
-            <a:r>
-              <a:rPr lang="en-US" sz="2800" b="1" dirty="0">
-                <a:solidFill>
-                  <a:srgbClr val="F8FAFC"/>
-                </a:solidFill>
-                <a:latin typeface="Times New Roman" panose="02020603050405020304" pitchFamily="18" charset="0"/>
-                <a:ea typeface="Instrument Serif" pitchFamily="34" charset="-122"/>
-                <a:cs typeface="Times New Roman" panose="02020603050405020304" pitchFamily="18" charset="0"/>
-              </a:rPr>
-              <a:t>Pentago as a state-space problem</a:t>
-            </a:r>
-            <a:endParaRPr lang="en-US" sz="2800" dirty="0">
-              <a:latin typeface="Times New Roman" panose="02020603050405020304" pitchFamily="18" charset="0"/>
-              <a:cs typeface="Times New Roman" panose="02020603050405020304" pitchFamily="18" charset="0"/>
-            </a:endParaRPr>
-          </a:p>
-        </p:txBody>
-      </p:sp>
-      <p:sp>
-        <p:nvSpPr>
-          <p:cNvPr id="43" name="Text 28"/>
-          <p:cNvSpPr/>
-          <p:nvPr/>
-        </p:nvSpPr>
-        <p:spPr>
-          <a:xfrm>
-            <a:off x="669806" y="1314450"/>
-            <a:ext cx="4113733" cy="3742046"/>
-          </a:xfrm>
-          <a:prstGeom prst="rect">
-            <a:avLst/>
-          </a:prstGeom>
-          <a:noFill/>
-          <a:ln/>
-        </p:spPr>
-        <p:txBody>
-          <a:bodyPr wrap="square" lIns="0" tIns="0" rIns="0" bIns="0" rtlCol="0" anchor="t"/>
-          <a:lstStyle/>
-          <a:p>
-            <a:pPr marL="342900" indent="-342900">
-              <a:lnSpc>
-                <a:spcPts val="2100"/>
-              </a:lnSpc>
-              <a:buSzPct val="100000"/>
-              <a:buChar char="•"/>
-            </a:pPr>
-            <a:r>
-              <a:rPr lang="en-US" sz="1600" dirty="0">
-                <a:solidFill>
-                  <a:srgbClr val="DBE4F0"/>
-                </a:solidFill>
-                <a:latin typeface="Times New Roman" panose="02020603050405020304" pitchFamily="18" charset="0"/>
-                <a:ea typeface="Inter" pitchFamily="34" charset="-122"/>
-                <a:cs typeface="Times New Roman" panose="02020603050405020304" pitchFamily="18" charset="0"/>
-              </a:rPr>
-              <a:t>The game uses a 6×6 board split into four rotatable 3×3 quadrants.</a:t>
-            </a:r>
-            <a:endParaRPr lang="en-US" sz="1600" dirty="0">
-              <a:latin typeface="Times New Roman" panose="02020603050405020304" pitchFamily="18" charset="0"/>
-              <a:cs typeface="Times New Roman" panose="02020603050405020304" pitchFamily="18" charset="0"/>
-            </a:endParaRPr>
-          </a:p>
-          <a:p>
-            <a:pPr marL="342900" indent="-342900">
-              <a:lnSpc>
-                <a:spcPts val="2100"/>
-              </a:lnSpc>
-              <a:buSzPct val="100000"/>
-              <a:buChar char="•"/>
-            </a:pPr>
-            <a:r>
-              <a:rPr lang="en-US" sz="1600" dirty="0">
-                <a:solidFill>
-                  <a:srgbClr val="DBE4F0"/>
-                </a:solidFill>
-                <a:latin typeface="Times New Roman" panose="02020603050405020304" pitchFamily="18" charset="0"/>
-                <a:ea typeface="Inter" pitchFamily="34" charset="-122"/>
-                <a:cs typeface="Times New Roman" panose="02020603050405020304" pitchFamily="18" charset="0"/>
-              </a:rPr>
-              <a:t>Each turn has two actions: place one marble, then rotate one quadrant clockwise or counter-clockwise.</a:t>
-            </a:r>
-            <a:endParaRPr lang="en-US" sz="1600" dirty="0">
-              <a:latin typeface="Times New Roman" panose="02020603050405020304" pitchFamily="18" charset="0"/>
-              <a:cs typeface="Times New Roman" panose="02020603050405020304" pitchFamily="18" charset="0"/>
-            </a:endParaRPr>
-          </a:p>
-          <a:p>
-            <a:pPr marL="342900" indent="-342900">
-              <a:lnSpc>
-                <a:spcPts val="2100"/>
-              </a:lnSpc>
-              <a:buSzPct val="100000"/>
-              <a:buChar char="•"/>
-            </a:pPr>
-            <a:r>
-              <a:rPr lang="en-US" sz="1600" dirty="0">
-                <a:solidFill>
-                  <a:srgbClr val="DBE4F0"/>
-                </a:solidFill>
-                <a:latin typeface="Times New Roman" panose="02020603050405020304" pitchFamily="18" charset="0"/>
-                <a:ea typeface="Inter" pitchFamily="34" charset="-122"/>
-                <a:cs typeface="Times New Roman" panose="02020603050405020304" pitchFamily="18" charset="0"/>
-              </a:rPr>
-              <a:t>The configured win test checks five contiguous marbles in rows or columns, not diagonals.</a:t>
-            </a:r>
-            <a:endParaRPr lang="en-US" sz="1600" dirty="0">
-              <a:latin typeface="Times New Roman" panose="02020603050405020304" pitchFamily="18" charset="0"/>
-              <a:cs typeface="Times New Roman" panose="02020603050405020304" pitchFamily="18" charset="0"/>
-            </a:endParaRPr>
-          </a:p>
-          <a:p>
-            <a:pPr marL="342900" indent="-342900">
-              <a:lnSpc>
-                <a:spcPts val="2100"/>
-              </a:lnSpc>
-              <a:buSzPct val="100000"/>
-              <a:buChar char="•"/>
-            </a:pPr>
-            <a:r>
-              <a:rPr lang="en-US" sz="1600" dirty="0">
-                <a:solidFill>
-                  <a:srgbClr val="DBE4F0"/>
-                </a:solidFill>
-                <a:latin typeface="Times New Roman" panose="02020603050405020304" pitchFamily="18" charset="0"/>
-                <a:ea typeface="Inter" pitchFamily="34" charset="-122"/>
-                <a:cs typeface="Times New Roman" panose="02020603050405020304" pitchFamily="18" charset="0"/>
-              </a:rPr>
-              <a:t>This creates a large branching factor because one placement can be paired with 8 rotation choices.</a:t>
-            </a:r>
-            <a:endParaRPr lang="en-US" sz="1600" dirty="0">
-              <a:latin typeface="Times New Roman" panose="02020603050405020304" pitchFamily="18" charset="0"/>
-              <a:cs typeface="Times New Roman" panose="02020603050405020304" pitchFamily="18" charset="0"/>
-            </a:endParaRPr>
-          </a:p>
-        </p:txBody>
-      </p:sp>
     </p:spTree>
   </p:cSld>
   <p:clrMapOvr>
